--- a/output_pptx/The_Power_Of_The_Cross.pptx
+++ b/output_pptx/The_Power_Of_The_Cross.pptx
@@ -3113,8 +3113,8 @@
         </p:nvSpPr>
         <p:spPr>
           <a:xfrm>
-            <a:off x="594360" y="1837944"/>
-            <a:ext cx="11002975" cy="685800"/>
+            <a:off x="640080" y="1650492"/>
+            <a:ext cx="10911535" cy="731520"/>
           </a:xfrm>
           <a:prstGeom prst="rect">
             <a:avLst/>
@@ -3129,7 +3129,7 @@
           <a:p>
             <a:pPr algn="ctr"/>
             <a:r>
-              <a:rPr sz="4400" b="1" i="0">
+              <a:rPr sz="4800" b="1" i="0">
                 <a:solidFill>
                   <a:srgbClr val="FFFFFF"/>
                 </a:solidFill>
@@ -3148,8 +3148,8 @@
         </p:nvSpPr>
         <p:spPr>
           <a:xfrm>
-            <a:off x="594360" y="2560320"/>
-            <a:ext cx="11002975" cy="384048"/>
+            <a:off x="640080" y="2418588"/>
+            <a:ext cx="10911535" cy="365760"/>
           </a:xfrm>
           <a:prstGeom prst="rect">
             <a:avLst/>
@@ -3166,7 +3166,7 @@
             <a:r>
               <a:rPr sz="2400" b="0" i="1">
                 <a:solidFill>
-                  <a:srgbClr val="B4B4B4"/>
+                  <a:srgbClr val="AAAAAA"/>
                 </a:solidFill>
                 <a:latin typeface="Arial"/>
               </a:rPr>
@@ -3183,8 +3183,8 @@
         </p:nvSpPr>
         <p:spPr>
           <a:xfrm>
-            <a:off x="594360" y="2980944"/>
-            <a:ext cx="11002975" cy="347472"/>
+            <a:off x="640080" y="2985516"/>
+            <a:ext cx="10911535" cy="731520"/>
           </a:xfrm>
           <a:prstGeom prst="rect">
             <a:avLst/>
@@ -3199,13 +3199,13 @@
           <a:p>
             <a:pPr algn="ctr"/>
             <a:r>
-              <a:rPr sz="2000" b="0" i="1">
-                <a:solidFill>
-                  <a:srgbClr val="8C8C8C"/>
+              <a:rPr sz="4800" b="1" i="0">
+                <a:solidFill>
+                  <a:srgbClr val="FFFFFF"/>
                 </a:solidFill>
                 <a:latin typeface="Arial"/>
               </a:rPr>
-              <a:t/>
+              <a:t>カルバリの十字架</a:t>
             </a:r>
           </a:p>
         </p:txBody>
@@ -3218,8 +3218,8 @@
         </p:nvSpPr>
         <p:spPr>
           <a:xfrm>
-            <a:off x="594360" y="3529584"/>
-            <a:ext cx="11002975" cy="685800"/>
+            <a:off x="640080" y="3753612"/>
+            <a:ext cx="10911535" cy="365760"/>
           </a:xfrm>
           <a:prstGeom prst="rect">
             <a:avLst/>
@@ -3234,13 +3234,13 @@
           <a:p>
             <a:pPr algn="ctr"/>
             <a:r>
-              <a:rPr sz="4400" b="1" i="0">
-                <a:solidFill>
-                  <a:srgbClr val="FFFFFF"/>
+              <a:rPr sz="2400" b="0" i="1">
+                <a:solidFill>
+                  <a:srgbClr val="AAAAAA"/>
                 </a:solidFill>
                 <a:latin typeface="Arial"/>
               </a:rPr>
-              <a:t>カルバリの十字架</a:t>
+              <a:t>karubari no juujika</a:t>
             </a:r>
           </a:p>
         </p:txBody>
@@ -3253,8 +3253,8 @@
         </p:nvSpPr>
         <p:spPr>
           <a:xfrm>
-            <a:off x="594360" y="4251960"/>
-            <a:ext cx="11002975" cy="384048"/>
+            <a:off x="640080" y="4530852"/>
+            <a:ext cx="10911535" cy="310896"/>
           </a:xfrm>
           <a:prstGeom prst="rect">
             <a:avLst/>
@@ -3269,13 +3269,13 @@
           <a:p>
             <a:pPr algn="ctr"/>
             <a:r>
-              <a:rPr sz="2400" b="0" i="1">
-                <a:solidFill>
-                  <a:srgbClr val="B4B4B4"/>
+              <a:rPr sz="2000" b="0" i="1">
+                <a:solidFill>
+                  <a:srgbClr val="828282"/>
                 </a:solidFill>
                 <a:latin typeface="Arial"/>
               </a:rPr>
-              <a:t>karubari no juujika</a:t>
+              <a:t>O Poder da Cruz</a:t>
             </a:r>
           </a:p>
         </p:txBody>
@@ -3288,8 +3288,8 @@
         </p:nvSpPr>
         <p:spPr>
           <a:xfrm>
-            <a:off x="594360" y="4672584"/>
-            <a:ext cx="11002975" cy="347472"/>
+            <a:off x="640080" y="4896612"/>
+            <a:ext cx="10911535" cy="310896"/>
           </a:xfrm>
           <a:prstGeom prst="rect">
             <a:avLst/>
@@ -3306,11 +3306,11 @@
             <a:r>
               <a:rPr sz="2000" b="0" i="1">
                 <a:solidFill>
-                  <a:srgbClr val="8C8C8C"/>
+                  <a:srgbClr val="828282"/>
                 </a:solidFill>
                 <a:latin typeface="Arial"/>
               </a:rPr>
-              <a:t/>
+              <a:t>Oh, ver o amanhecer</a:t>
             </a:r>
           </a:p>
         </p:txBody>
@@ -3349,8 +3349,8 @@
         </p:nvSpPr>
         <p:spPr>
           <a:xfrm>
-            <a:off x="594360" y="1837944"/>
-            <a:ext cx="11002975" cy="685800"/>
+            <a:off x="640080" y="1650492"/>
+            <a:ext cx="10911535" cy="731520"/>
           </a:xfrm>
           <a:prstGeom prst="rect">
             <a:avLst/>
@@ -3365,7 +3365,7 @@
           <a:p>
             <a:pPr algn="ctr"/>
             <a:r>
-              <a:rPr sz="4400" b="1" i="0">
+              <a:rPr sz="4800" b="1" i="0">
                 <a:solidFill>
                   <a:srgbClr val="FFFFFF"/>
                 </a:solidFill>
@@ -3384,8 +3384,8 @@
         </p:nvSpPr>
         <p:spPr>
           <a:xfrm>
-            <a:off x="594360" y="2560320"/>
-            <a:ext cx="11002975" cy="384048"/>
+            <a:off x="640080" y="2418588"/>
+            <a:ext cx="10911535" cy="365760"/>
           </a:xfrm>
           <a:prstGeom prst="rect">
             <a:avLst/>
@@ -3402,7 +3402,7 @@
             <a:r>
               <a:rPr sz="2400" b="0" i="1">
                 <a:solidFill>
-                  <a:srgbClr val="B4B4B4"/>
+                  <a:srgbClr val="AAAAAA"/>
                 </a:solidFill>
                 <a:latin typeface="Arial"/>
               </a:rPr>
@@ -3419,8 +3419,8 @@
         </p:nvSpPr>
         <p:spPr>
           <a:xfrm>
-            <a:off x="594360" y="2980944"/>
-            <a:ext cx="11002975" cy="347472"/>
+            <a:off x="640080" y="2985516"/>
+            <a:ext cx="10911535" cy="731520"/>
           </a:xfrm>
           <a:prstGeom prst="rect">
             <a:avLst/>
@@ -3435,13 +3435,13 @@
           <a:p>
             <a:pPr algn="ctr"/>
             <a:r>
-              <a:rPr sz="2000" b="0" i="1">
-                <a:solidFill>
-                  <a:srgbClr val="8C8C8C"/>
+              <a:rPr sz="4800" b="1" i="0">
+                <a:solidFill>
+                  <a:srgbClr val="FFFFFF"/>
                 </a:solidFill>
                 <a:latin typeface="Arial"/>
               </a:rPr>
-              <a:t/>
+              <a:t>深い 愛は　主イェスの十 - 字架</a:t>
             </a:r>
           </a:p>
         </p:txBody>
@@ -3454,8 +3454,8 @@
         </p:nvSpPr>
         <p:spPr>
           <a:xfrm>
-            <a:off x="594360" y="3529584"/>
-            <a:ext cx="11002975" cy="685800"/>
+            <a:off x="640080" y="3753612"/>
+            <a:ext cx="10911535" cy="365760"/>
           </a:xfrm>
           <a:prstGeom prst="rect">
             <a:avLst/>
@@ -3470,13 +3470,13 @@
           <a:p>
             <a:pPr algn="ctr"/>
             <a:r>
-              <a:rPr sz="4400" b="1" i="0">
-                <a:solidFill>
-                  <a:srgbClr val="FFFFFF"/>
+              <a:rPr sz="2400" b="0" i="1">
+                <a:solidFill>
+                  <a:srgbClr val="AAAAAA"/>
                 </a:solidFill>
                 <a:latin typeface="Arial"/>
               </a:rPr>
-              <a:t>深い 愛は　主イェスの十 - 字架</a:t>
+              <a:t>fukai ai wa  shu iesu no juujika</a:t>
             </a:r>
           </a:p>
         </p:txBody>
@@ -3489,8 +3489,8 @@
         </p:nvSpPr>
         <p:spPr>
           <a:xfrm>
-            <a:off x="594360" y="4251960"/>
-            <a:ext cx="11002975" cy="384048"/>
+            <a:off x="640080" y="4530852"/>
+            <a:ext cx="10911535" cy="310896"/>
           </a:xfrm>
           <a:prstGeom prst="rect">
             <a:avLst/>
@@ -3505,13 +3505,13 @@
           <a:p>
             <a:pPr algn="ctr"/>
             <a:r>
-              <a:rPr sz="2400" b="0" i="1">
-                <a:solidFill>
-                  <a:srgbClr val="B4B4B4"/>
+              <a:rPr sz="2000" b="0" i="1">
+                <a:solidFill>
+                  <a:srgbClr val="828282"/>
                 </a:solidFill>
                 <a:latin typeface="Arial"/>
               </a:rPr>
-              <a:t>fukai ai wa  shu iesu no juujika</a:t>
+              <a:t>Julgado por homens pecadores</a:t>
             </a:r>
           </a:p>
         </p:txBody>
@@ -3524,8 +3524,8 @@
         </p:nvSpPr>
         <p:spPr>
           <a:xfrm>
-            <a:off x="594360" y="4672584"/>
-            <a:ext cx="11002975" cy="347472"/>
+            <a:off x="640080" y="4896612"/>
+            <a:ext cx="10911535" cy="310896"/>
           </a:xfrm>
           <a:prstGeom prst="rect">
             <a:avLst/>
@@ -3542,11 +3542,11 @@
             <a:r>
               <a:rPr sz="2000" b="0" i="1">
                 <a:solidFill>
-                  <a:srgbClr val="8C8C8C"/>
+                  <a:srgbClr val="828282"/>
                 </a:solidFill>
                 <a:latin typeface="Arial"/>
               </a:rPr>
-              <a:t/>
+              <a:t>Rasgado e espancado</a:t>
             </a:r>
           </a:p>
         </p:txBody>
@@ -3585,8 +3585,8 @@
         </p:nvSpPr>
         <p:spPr>
           <a:xfrm>
-            <a:off x="594360" y="1837944"/>
-            <a:ext cx="11002975" cy="685800"/>
+            <a:off x="640080" y="1650492"/>
+            <a:ext cx="10911535" cy="731520"/>
           </a:xfrm>
           <a:prstGeom prst="rect">
             <a:avLst/>
@@ -3601,7 +3601,7 @@
           <a:p>
             <a:pPr algn="ctr"/>
             <a:r>
-              <a:rPr sz="4400" b="1" i="0">
+              <a:rPr sz="4800" b="1" i="0">
                 <a:solidFill>
                   <a:srgbClr val="FFFFFF"/>
                 </a:solidFill>
@@ -3620,8 +3620,8 @@
         </p:nvSpPr>
         <p:spPr>
           <a:xfrm>
-            <a:off x="594360" y="2560320"/>
-            <a:ext cx="11002975" cy="384048"/>
+            <a:off x="640080" y="2418588"/>
+            <a:ext cx="10911535" cy="365760"/>
           </a:xfrm>
           <a:prstGeom prst="rect">
             <a:avLst/>
@@ -3638,7 +3638,7 @@
             <a:r>
               <a:rPr sz="2400" b="0" i="1">
                 <a:solidFill>
-                  <a:srgbClr val="B4B4B4"/>
+                  <a:srgbClr val="AAAAAA"/>
                 </a:solidFill>
                 <a:latin typeface="Arial"/>
               </a:rPr>
@@ -3655,8 +3655,8 @@
         </p:nvSpPr>
         <p:spPr>
           <a:xfrm>
-            <a:off x="594360" y="2980944"/>
-            <a:ext cx="11002975" cy="347472"/>
+            <a:off x="640080" y="2985516"/>
+            <a:ext cx="10911535" cy="731520"/>
           </a:xfrm>
           <a:prstGeom prst="rect">
             <a:avLst/>
@@ -3671,13 +3671,13 @@
           <a:p>
             <a:pPr algn="ctr"/>
             <a:r>
-              <a:rPr sz="2000" b="0" i="1">
-                <a:solidFill>
-                  <a:srgbClr val="8C8C8C"/>
+              <a:rPr sz="4800" b="1" i="0">
+                <a:solidFill>
+                  <a:srgbClr val="FFFFFF"/>
                 </a:solidFill>
                 <a:latin typeface="Arial"/>
               </a:rPr>
-              <a:t/>
+              <a:t>打たれた主よ</a:t>
             </a:r>
           </a:p>
         </p:txBody>
@@ -3690,8 +3690,8 @@
         </p:nvSpPr>
         <p:spPr>
           <a:xfrm>
-            <a:off x="594360" y="3529584"/>
-            <a:ext cx="11002975" cy="685800"/>
+            <a:off x="640080" y="3753612"/>
+            <a:ext cx="10911535" cy="365760"/>
           </a:xfrm>
           <a:prstGeom prst="rect">
             <a:avLst/>
@@ -3706,13 +3706,13 @@
           <a:p>
             <a:pPr algn="ctr"/>
             <a:r>
-              <a:rPr sz="4400" b="1" i="0">
-                <a:solidFill>
-                  <a:srgbClr val="FFFFFF"/>
+              <a:rPr sz="2400" b="0" i="1">
+                <a:solidFill>
+                  <a:srgbClr val="AAAAAA"/>
                 </a:solidFill>
                 <a:latin typeface="Arial"/>
               </a:rPr>
-              <a:t>打たれた主よ</a:t>
+              <a:t>utareta shu yo</a:t>
             </a:r>
           </a:p>
         </p:txBody>
@@ -3725,8 +3725,8 @@
         </p:nvSpPr>
         <p:spPr>
           <a:xfrm>
-            <a:off x="594360" y="4251960"/>
-            <a:ext cx="11002975" cy="384048"/>
+            <a:off x="640080" y="4530852"/>
+            <a:ext cx="10911535" cy="310896"/>
           </a:xfrm>
           <a:prstGeom prst="rect">
             <a:avLst/>
@@ -3741,13 +3741,13 @@
           <a:p>
             <a:pPr algn="ctr"/>
             <a:r>
-              <a:rPr sz="2400" b="0" i="1">
-                <a:solidFill>
-                  <a:srgbClr val="B4B4B4"/>
+              <a:rPr sz="2000" b="0" i="1">
+                <a:solidFill>
+                  <a:srgbClr val="828282"/>
                 </a:solidFill>
                 <a:latin typeface="Arial"/>
               </a:rPr>
-              <a:t>utareta shu yo</a:t>
+              <a:t>Do dia mais sombrio:</a:t>
             </a:r>
           </a:p>
         </p:txBody>
@@ -3760,8 +3760,8 @@
         </p:nvSpPr>
         <p:spPr>
           <a:xfrm>
-            <a:off x="594360" y="4672584"/>
-            <a:ext cx="11002975" cy="347472"/>
+            <a:off x="640080" y="4896612"/>
+            <a:ext cx="10911535" cy="310896"/>
           </a:xfrm>
           <a:prstGeom prst="rect">
             <a:avLst/>
@@ -3778,11 +3778,11 @@
             <a:r>
               <a:rPr sz="2000" b="0" i="1">
                 <a:solidFill>
-                  <a:srgbClr val="8C8C8C"/>
+                  <a:srgbClr val="828282"/>
                 </a:solidFill>
                 <a:latin typeface="Arial"/>
               </a:rPr>
-              <a:t/>
+              <a:t>Cristo no caminho para o Calvário</a:t>
             </a:r>
           </a:p>
         </p:txBody>
@@ -3821,8 +3821,8 @@
         </p:nvSpPr>
         <p:spPr>
           <a:xfrm>
-            <a:off x="594360" y="1837944"/>
-            <a:ext cx="11002975" cy="685800"/>
+            <a:off x="640080" y="1650492"/>
+            <a:ext cx="10911535" cy="731520"/>
           </a:xfrm>
           <a:prstGeom prst="rect">
             <a:avLst/>
@@ -3837,7 +3837,7 @@
           <a:p>
             <a:pPr algn="ctr"/>
             <a:r>
-              <a:rPr sz="4400" b="1" i="0">
+              <a:rPr sz="4800" b="1" i="0">
                 <a:solidFill>
                   <a:srgbClr val="FFFFFF"/>
                 </a:solidFill>
@@ -3856,8 +3856,8 @@
         </p:nvSpPr>
         <p:spPr>
           <a:xfrm>
-            <a:off x="594360" y="2560320"/>
-            <a:ext cx="11002975" cy="384048"/>
+            <a:off x="640080" y="2418588"/>
+            <a:ext cx="10911535" cy="365760"/>
           </a:xfrm>
           <a:prstGeom prst="rect">
             <a:avLst/>
@@ -3874,7 +3874,7 @@
             <a:r>
               <a:rPr sz="2400" b="0" i="1">
                 <a:solidFill>
-                  <a:srgbClr val="B4B4B4"/>
+                  <a:srgbClr val="AAAAAA"/>
                 </a:solidFill>
                 <a:latin typeface="Arial"/>
               </a:rPr>
@@ -3891,8 +3891,8 @@
         </p:nvSpPr>
         <p:spPr>
           <a:xfrm>
-            <a:off x="594360" y="2980944"/>
-            <a:ext cx="11002975" cy="347472"/>
+            <a:off x="640080" y="2985516"/>
+            <a:ext cx="10911535" cy="731520"/>
           </a:xfrm>
           <a:prstGeom prst="rect">
             <a:avLst/>
@@ -3907,13 +3907,13 @@
           <a:p>
             <a:pPr algn="ctr"/>
             <a:r>
-              <a:rPr sz="2000" b="0" i="1">
-                <a:solidFill>
-                  <a:srgbClr val="8C8C8C"/>
+              <a:rPr sz="4800" b="1" i="0">
+                <a:solidFill>
+                  <a:srgbClr val="FFFFFF"/>
                 </a:solidFill>
                 <a:latin typeface="Arial"/>
               </a:rPr>
-              <a:t/>
+              <a:t>罪を赦す　主イェスの十 - 字架</a:t>
             </a:r>
           </a:p>
         </p:txBody>
@@ -3926,8 +3926,8 @@
         </p:nvSpPr>
         <p:spPr>
           <a:xfrm>
-            <a:off x="594360" y="3529584"/>
-            <a:ext cx="11002975" cy="685800"/>
+            <a:off x="640080" y="3753612"/>
+            <a:ext cx="10911535" cy="365760"/>
           </a:xfrm>
           <a:prstGeom prst="rect">
             <a:avLst/>
@@ -3942,13 +3942,13 @@
           <a:p>
             <a:pPr algn="ctr"/>
             <a:r>
-              <a:rPr sz="4400" b="1" i="0">
-                <a:solidFill>
-                  <a:srgbClr val="FFFFFF"/>
+              <a:rPr sz="2400" b="0" i="1">
+                <a:solidFill>
+                  <a:srgbClr val="AAAAAA"/>
                 </a:solidFill>
                 <a:latin typeface="Arial"/>
               </a:rPr>
-              <a:t>罪を赦す　主イェスの十 - 字架</a:t>
+              <a:t>tsumi wo yurusu  shu iesu no juujika</a:t>
             </a:r>
           </a:p>
         </p:txBody>
@@ -3961,8 +3961,8 @@
         </p:nvSpPr>
         <p:spPr>
           <a:xfrm>
-            <a:off x="594360" y="4251960"/>
-            <a:ext cx="11002975" cy="384048"/>
+            <a:off x="640080" y="4530852"/>
+            <a:ext cx="10911535" cy="310896"/>
           </a:xfrm>
           <a:prstGeom prst="rect">
             <a:avLst/>
@@ -3977,13 +3977,13 @@
           <a:p>
             <a:pPr algn="ctr"/>
             <a:r>
-              <a:rPr sz="2400" b="0" i="1">
-                <a:solidFill>
-                  <a:srgbClr val="B4B4B4"/>
+              <a:rPr sz="2000" b="0" i="1">
+                <a:solidFill>
+                  <a:srgbClr val="828282"/>
                 </a:solidFill>
                 <a:latin typeface="Arial"/>
               </a:rPr>
-              <a:t>tsumi wo yurusu  shu iesu no juujika</a:t>
+              <a:t>Julgado por homens pecadores</a:t>
             </a:r>
           </a:p>
         </p:txBody>
@@ -3996,8 +3996,8 @@
         </p:nvSpPr>
         <p:spPr>
           <a:xfrm>
-            <a:off x="594360" y="4672584"/>
-            <a:ext cx="11002975" cy="347472"/>
+            <a:off x="640080" y="4896612"/>
+            <a:ext cx="10911535" cy="310896"/>
           </a:xfrm>
           <a:prstGeom prst="rect">
             <a:avLst/>
@@ -4014,11 +4014,11 @@
             <a:r>
               <a:rPr sz="2000" b="0" i="1">
                 <a:solidFill>
-                  <a:srgbClr val="8C8C8C"/>
+                  <a:srgbClr val="828282"/>
                 </a:solidFill>
                 <a:latin typeface="Arial"/>
               </a:rPr>
-              <a:t/>
+              <a:t>Rasgado e espancado</a:t>
             </a:r>
           </a:p>
         </p:txBody>
@@ -4057,8 +4057,8 @@
         </p:nvSpPr>
         <p:spPr>
           <a:xfrm>
-            <a:off x="594360" y="2258568"/>
-            <a:ext cx="11002975" cy="685800"/>
+            <a:off x="640080" y="2052828"/>
+            <a:ext cx="10911535" cy="731520"/>
           </a:xfrm>
           <a:prstGeom prst="rect">
             <a:avLst/>
@@ -4073,7 +4073,7 @@
           <a:p>
             <a:pPr algn="ctr"/>
             <a:r>
-              <a:rPr sz="4400" b="1" i="0">
+              <a:rPr sz="4800" b="1" i="0">
                 <a:solidFill>
                   <a:srgbClr val="FFFFFF"/>
                 </a:solidFill>
@@ -4092,8 +4092,8 @@
         </p:nvSpPr>
         <p:spPr>
           <a:xfrm>
-            <a:off x="594360" y="2980944"/>
-            <a:ext cx="11002975" cy="347472"/>
+            <a:off x="640080" y="2985516"/>
+            <a:ext cx="10911535" cy="731520"/>
           </a:xfrm>
           <a:prstGeom prst="rect">
             <a:avLst/>
@@ -4108,83 +4108,13 @@
           <a:p>
             <a:pPr algn="ctr"/>
             <a:r>
-              <a:rPr sz="2200" b="0" i="1">
-                <a:solidFill>
-                  <a:srgbClr val="8C8C8C"/>
-                </a:solidFill>
-                <a:latin typeface="Arial"/>
-              </a:rPr>
-              <a:t/>
-            </a:r>
-          </a:p>
-        </p:txBody>
-      </p:sp>
-      <p:sp>
-        <p:nvSpPr>
-          <p:cNvPr id="4" name="TextBox 3"/>
-          <p:cNvSpPr txBox="1"/>
-          <p:nvPr/>
-        </p:nvSpPr>
-        <p:spPr>
-          <a:xfrm>
-            <a:off x="594360" y="3529584"/>
-            <a:ext cx="11002975" cy="685800"/>
-          </a:xfrm>
-          <a:prstGeom prst="rect">
-            <a:avLst/>
-          </a:prstGeom>
-          <a:noFill/>
-        </p:spPr>
-        <p:txBody>
-          <a:bodyPr wrap="square">
-            <a:spAutoFit/>
-          </a:bodyPr>
-          <a:lstStyle/>
-          <a:p>
-            <a:pPr algn="ctr"/>
-            <a:r>
-              <a:rPr sz="4400" b="1" i="0">
+              <a:rPr sz="4800" b="1" i="0">
                 <a:solidFill>
                   <a:srgbClr val="FFFFFF"/>
                 </a:solidFill>
                 <a:latin typeface="Arial"/>
               </a:rPr>
               <a:t>Oh, ver o amanhecer</a:t>
-            </a:r>
-          </a:p>
-        </p:txBody>
-      </p:sp>
-      <p:sp>
-        <p:nvSpPr>
-          <p:cNvPr id="5" name="TextBox 4"/>
-          <p:cNvSpPr txBox="1"/>
-          <p:nvPr/>
-        </p:nvSpPr>
-        <p:spPr>
-          <a:xfrm>
-            <a:off x="594360" y="4251960"/>
-            <a:ext cx="11002975" cy="347472"/>
-          </a:xfrm>
-          <a:prstGeom prst="rect">
-            <a:avLst/>
-          </a:prstGeom>
-          <a:noFill/>
-        </p:spPr>
-        <p:txBody>
-          <a:bodyPr wrap="square">
-            <a:spAutoFit/>
-          </a:bodyPr>
-          <a:lstStyle/>
-          <a:p>
-            <a:pPr algn="ctr"/>
-            <a:r>
-              <a:rPr sz="2200" b="0" i="1">
-                <a:solidFill>
-                  <a:srgbClr val="8C8C8C"/>
-                </a:solidFill>
-                <a:latin typeface="Arial"/>
-              </a:rPr>
-              <a:t/>
             </a:r>
           </a:p>
         </p:txBody>
@@ -4223,8 +4153,8 @@
         </p:nvSpPr>
         <p:spPr>
           <a:xfrm>
-            <a:off x="594360" y="2258568"/>
-            <a:ext cx="11002975" cy="685800"/>
+            <a:off x="640080" y="2052828"/>
+            <a:ext cx="10911535" cy="731520"/>
           </a:xfrm>
           <a:prstGeom prst="rect">
             <a:avLst/>
@@ -4239,7 +4169,7 @@
           <a:p>
             <a:pPr algn="ctr"/>
             <a:r>
-              <a:rPr sz="4400" b="1" i="0">
+              <a:rPr sz="4800" b="1" i="0">
                 <a:solidFill>
                   <a:srgbClr val="FFFFFF"/>
                 </a:solidFill>
@@ -4258,8 +4188,8 @@
         </p:nvSpPr>
         <p:spPr>
           <a:xfrm>
-            <a:off x="594360" y="2980944"/>
-            <a:ext cx="11002975" cy="347472"/>
+            <a:off x="640080" y="2985516"/>
+            <a:ext cx="10911535" cy="731520"/>
           </a:xfrm>
           <a:prstGeom prst="rect">
             <a:avLst/>
@@ -4274,83 +4204,13 @@
           <a:p>
             <a:pPr algn="ctr"/>
             <a:r>
-              <a:rPr sz="2200" b="0" i="1">
-                <a:solidFill>
-                  <a:srgbClr val="8C8C8C"/>
-                </a:solidFill>
-                <a:latin typeface="Arial"/>
-              </a:rPr>
-              <a:t/>
-            </a:r>
-          </a:p>
-        </p:txBody>
-      </p:sp>
-      <p:sp>
-        <p:nvSpPr>
-          <p:cNvPr id="4" name="TextBox 3"/>
-          <p:cNvSpPr txBox="1"/>
-          <p:nvPr/>
-        </p:nvSpPr>
-        <p:spPr>
-          <a:xfrm>
-            <a:off x="594360" y="3529584"/>
-            <a:ext cx="11002975" cy="685800"/>
-          </a:xfrm>
-          <a:prstGeom prst="rect">
-            <a:avLst/>
-          </a:prstGeom>
-          <a:noFill/>
-        </p:spPr>
-        <p:txBody>
-          <a:bodyPr wrap="square">
-            <a:spAutoFit/>
-          </a:bodyPr>
-          <a:lstStyle/>
-          <a:p>
-            <a:pPr algn="ctr"/>
-            <a:r>
-              <a:rPr sz="4266" b="1" i="0">
+              <a:rPr sz="4600" b="1" i="0">
                 <a:solidFill>
                   <a:srgbClr val="FFFFFF"/>
                 </a:solidFill>
                 <a:latin typeface="Arial"/>
               </a:rPr>
               <a:t>Cristo no caminho para o Calvário</a:t>
-            </a:r>
-          </a:p>
-        </p:txBody>
-      </p:sp>
-      <p:sp>
-        <p:nvSpPr>
-          <p:cNvPr id="5" name="TextBox 4"/>
-          <p:cNvSpPr txBox="1"/>
-          <p:nvPr/>
-        </p:nvSpPr>
-        <p:spPr>
-          <a:xfrm>
-            <a:off x="594360" y="4251960"/>
-            <a:ext cx="11002975" cy="347472"/>
-          </a:xfrm>
-          <a:prstGeom prst="rect">
-            <a:avLst/>
-          </a:prstGeom>
-          <a:noFill/>
-        </p:spPr>
-        <p:txBody>
-          <a:bodyPr wrap="square">
-            <a:spAutoFit/>
-          </a:bodyPr>
-          <a:lstStyle/>
-          <a:p>
-            <a:pPr algn="ctr"/>
-            <a:r>
-              <a:rPr sz="2200" b="0" i="1">
-                <a:solidFill>
-                  <a:srgbClr val="8C8C8C"/>
-                </a:solidFill>
-                <a:latin typeface="Arial"/>
-              </a:rPr>
-              <a:t/>
             </a:r>
           </a:p>
         </p:txBody>
@@ -4389,8 +4249,8 @@
         </p:nvSpPr>
         <p:spPr>
           <a:xfrm>
-            <a:off x="594360" y="2258568"/>
-            <a:ext cx="11002975" cy="685800"/>
+            <a:off x="640080" y="2052828"/>
+            <a:ext cx="10911535" cy="731520"/>
           </a:xfrm>
           <a:prstGeom prst="rect">
             <a:avLst/>
@@ -4405,7 +4265,7 @@
           <a:p>
             <a:pPr algn="ctr"/>
             <a:r>
-              <a:rPr sz="4400" b="1" i="0">
+              <a:rPr sz="4800" b="1" i="0">
                 <a:solidFill>
                   <a:srgbClr val="FFFFFF"/>
                 </a:solidFill>
@@ -4424,8 +4284,8 @@
         </p:nvSpPr>
         <p:spPr>
           <a:xfrm>
-            <a:off x="594360" y="2980944"/>
-            <a:ext cx="11002975" cy="347472"/>
+            <a:off x="640080" y="2985516"/>
+            <a:ext cx="10911535" cy="731520"/>
           </a:xfrm>
           <a:prstGeom prst="rect">
             <a:avLst/>
@@ -4440,83 +4300,13 @@
           <a:p>
             <a:pPr algn="ctr"/>
             <a:r>
-              <a:rPr sz="2200" b="0" i="1">
-                <a:solidFill>
-                  <a:srgbClr val="8C8C8C"/>
-                </a:solidFill>
-                <a:latin typeface="Arial"/>
-              </a:rPr>
-              <a:t/>
-            </a:r>
-          </a:p>
-        </p:txBody>
-      </p:sp>
-      <p:sp>
-        <p:nvSpPr>
-          <p:cNvPr id="4" name="TextBox 3"/>
-          <p:cNvSpPr txBox="1"/>
-          <p:nvPr/>
-        </p:nvSpPr>
-        <p:spPr>
-          <a:xfrm>
-            <a:off x="594360" y="3529584"/>
-            <a:ext cx="11002975" cy="685800"/>
-          </a:xfrm>
-          <a:prstGeom prst="rect">
-            <a:avLst/>
-          </a:prstGeom>
-          <a:noFill/>
-        </p:spPr>
-        <p:txBody>
-          <a:bodyPr wrap="square">
-            <a:spAutoFit/>
-          </a:bodyPr>
-          <a:lstStyle/>
-          <a:p>
-            <a:pPr algn="ctr"/>
-            <a:r>
-              <a:rPr sz="4400" b="1" i="0">
+              <a:rPr sz="4800" b="1" i="0">
                 <a:solidFill>
                   <a:srgbClr val="FFFFFF"/>
                 </a:solidFill>
                 <a:latin typeface="Arial"/>
               </a:rPr>
               <a:t>Rasgado e espancado</a:t>
-            </a:r>
-          </a:p>
-        </p:txBody>
-      </p:sp>
-      <p:sp>
-        <p:nvSpPr>
-          <p:cNvPr id="5" name="TextBox 4"/>
-          <p:cNvSpPr txBox="1"/>
-          <p:nvPr/>
-        </p:nvSpPr>
-        <p:spPr>
-          <a:xfrm>
-            <a:off x="594360" y="4251960"/>
-            <a:ext cx="11002975" cy="347472"/>
-          </a:xfrm>
-          <a:prstGeom prst="rect">
-            <a:avLst/>
-          </a:prstGeom>
-          <a:noFill/>
-        </p:spPr>
-        <p:txBody>
-          <a:bodyPr wrap="square">
-            <a:spAutoFit/>
-          </a:bodyPr>
-          <a:lstStyle/>
-          <a:p>
-            <a:pPr algn="ctr"/>
-            <a:r>
-              <a:rPr sz="2200" b="0" i="1">
-                <a:solidFill>
-                  <a:srgbClr val="8C8C8C"/>
-                </a:solidFill>
-                <a:latin typeface="Arial"/>
-              </a:rPr>
-              <a:t/>
             </a:r>
           </a:p>
         </p:txBody>
@@ -4555,8 +4345,8 @@
         </p:nvSpPr>
         <p:spPr>
           <a:xfrm>
-            <a:off x="594360" y="2258568"/>
-            <a:ext cx="11002975" cy="685800"/>
+            <a:off x="640080" y="2052828"/>
+            <a:ext cx="10911535" cy="731520"/>
           </a:xfrm>
           <a:prstGeom prst="rect">
             <a:avLst/>
@@ -4571,7 +4361,7 @@
           <a:p>
             <a:pPr algn="ctr"/>
             <a:r>
-              <a:rPr sz="4400" b="1" i="0">
+              <a:rPr sz="4800" b="1" i="0">
                 <a:solidFill>
                   <a:srgbClr val="FFFFFF"/>
                 </a:solidFill>
@@ -4590,8 +4380,8 @@
         </p:nvSpPr>
         <p:spPr>
           <a:xfrm>
-            <a:off x="594360" y="2980944"/>
-            <a:ext cx="11002975" cy="347472"/>
+            <a:off x="640080" y="2985516"/>
+            <a:ext cx="10911535" cy="731520"/>
           </a:xfrm>
           <a:prstGeom prst="rect">
             <a:avLst/>
@@ -4606,83 +4396,13 @@
           <a:p>
             <a:pPr algn="ctr"/>
             <a:r>
-              <a:rPr sz="2200" b="0" i="1">
-                <a:solidFill>
-                  <a:srgbClr val="8C8C8C"/>
-                </a:solidFill>
-                <a:latin typeface="Arial"/>
-              </a:rPr>
-              <a:t/>
-            </a:r>
-          </a:p>
-        </p:txBody>
-      </p:sp>
-      <p:sp>
-        <p:nvSpPr>
-          <p:cNvPr id="4" name="TextBox 3"/>
-          <p:cNvSpPr txBox="1"/>
-          <p:nvPr/>
-        </p:nvSpPr>
-        <p:spPr>
-          <a:xfrm>
-            <a:off x="594360" y="3529584"/>
-            <a:ext cx="11002975" cy="685800"/>
-          </a:xfrm>
-          <a:prstGeom prst="rect">
-            <a:avLst/>
-          </a:prstGeom>
-          <a:noFill/>
-        </p:spPr>
-        <p:txBody>
-          <a:bodyPr wrap="square">
-            <a:spAutoFit/>
-          </a:bodyPr>
-          <a:lstStyle/>
-          <a:p>
-            <a:pPr algn="ctr"/>
-            <a:r>
-              <a:rPr sz="4400" b="1" i="0">
+              <a:rPr sz="4800" b="1" i="0">
                 <a:solidFill>
                   <a:srgbClr val="FFFFFF"/>
                 </a:solidFill>
                 <a:latin typeface="Arial"/>
               </a:rPr>
               <a:t>Rasgado e espancado</a:t>
-            </a:r>
-          </a:p>
-        </p:txBody>
-      </p:sp>
-      <p:sp>
-        <p:nvSpPr>
-          <p:cNvPr id="5" name="TextBox 4"/>
-          <p:cNvSpPr txBox="1"/>
-          <p:nvPr/>
-        </p:nvSpPr>
-        <p:spPr>
-          <a:xfrm>
-            <a:off x="594360" y="4251960"/>
-            <a:ext cx="11002975" cy="347472"/>
-          </a:xfrm>
-          <a:prstGeom prst="rect">
-            <a:avLst/>
-          </a:prstGeom>
-          <a:noFill/>
-        </p:spPr>
-        <p:txBody>
-          <a:bodyPr wrap="square">
-            <a:spAutoFit/>
-          </a:bodyPr>
-          <a:lstStyle/>
-          <a:p>
-            <a:pPr algn="ctr"/>
-            <a:r>
-              <a:rPr sz="2200" b="0" i="1">
-                <a:solidFill>
-                  <a:srgbClr val="8C8C8C"/>
-                </a:solidFill>
-                <a:latin typeface="Arial"/>
-              </a:rPr>
-              <a:t/>
             </a:r>
           </a:p>
         </p:txBody>
@@ -4721,8 +4441,8 @@
         </p:nvSpPr>
         <p:spPr>
           <a:xfrm>
-            <a:off x="594360" y="1837944"/>
-            <a:ext cx="11002975" cy="685800"/>
+            <a:off x="640080" y="1650492"/>
+            <a:ext cx="10911535" cy="731520"/>
           </a:xfrm>
           <a:prstGeom prst="rect">
             <a:avLst/>
@@ -4737,7 +4457,7 @@
           <a:p>
             <a:pPr algn="ctr"/>
             <a:r>
-              <a:rPr sz="4400" b="1" i="0">
+              <a:rPr sz="4800" b="1" i="0">
                 <a:solidFill>
                   <a:srgbClr val="FFFFFF"/>
                 </a:solidFill>
@@ -4756,8 +4476,8 @@
         </p:nvSpPr>
         <p:spPr>
           <a:xfrm>
-            <a:off x="594360" y="2560320"/>
-            <a:ext cx="11002975" cy="384048"/>
+            <a:off x="640080" y="2418588"/>
+            <a:ext cx="10911535" cy="365760"/>
           </a:xfrm>
           <a:prstGeom prst="rect">
             <a:avLst/>
@@ -4774,7 +4494,7 @@
             <a:r>
               <a:rPr sz="2400" b="0" i="1">
                 <a:solidFill>
-                  <a:srgbClr val="B4B4B4"/>
+                  <a:srgbClr val="AAAAAA"/>
                 </a:solidFill>
                 <a:latin typeface="Arial"/>
               </a:rPr>
@@ -4791,8 +4511,8 @@
         </p:nvSpPr>
         <p:spPr>
           <a:xfrm>
-            <a:off x="594360" y="2980944"/>
-            <a:ext cx="11002975" cy="347472"/>
+            <a:off x="640080" y="2985516"/>
+            <a:ext cx="10911535" cy="731520"/>
           </a:xfrm>
           <a:prstGeom prst="rect">
             <a:avLst/>
@@ -4807,13 +4527,13 @@
           <a:p>
             <a:pPr algn="ctr"/>
             <a:r>
-              <a:rPr sz="2000" b="0" i="1">
-                <a:solidFill>
-                  <a:srgbClr val="8C8C8C"/>
+              <a:rPr sz="4800" b="1" i="0">
+                <a:solidFill>
+                  <a:srgbClr val="FFFFFF"/>
                 </a:solidFill>
                 <a:latin typeface="Arial"/>
               </a:rPr>
-              <a:t/>
+              <a:t>地はゆれ動いた</a:t>
             </a:r>
           </a:p>
         </p:txBody>
@@ -4826,8 +4546,8 @@
         </p:nvSpPr>
         <p:spPr>
           <a:xfrm>
-            <a:off x="594360" y="3529584"/>
-            <a:ext cx="11002975" cy="685800"/>
+            <a:off x="640080" y="3753612"/>
+            <a:ext cx="10911535" cy="365760"/>
           </a:xfrm>
           <a:prstGeom prst="rect">
             <a:avLst/>
@@ -4842,13 +4562,13 @@
           <a:p>
             <a:pPr algn="ctr"/>
             <a:r>
-              <a:rPr sz="4400" b="1" i="0">
-                <a:solidFill>
-                  <a:srgbClr val="FFFFFF"/>
+              <a:rPr sz="2400" b="0" i="1">
+                <a:solidFill>
+                  <a:srgbClr val="AAAAAA"/>
                 </a:solidFill>
                 <a:latin typeface="Arial"/>
               </a:rPr>
-              <a:t>地はゆれ動いた</a:t>
+              <a:t>chi wa yureugoita</a:t>
             </a:r>
           </a:p>
         </p:txBody>
@@ -4861,8 +4581,8 @@
         </p:nvSpPr>
         <p:spPr>
           <a:xfrm>
-            <a:off x="594360" y="4251960"/>
-            <a:ext cx="11002975" cy="384048"/>
+            <a:off x="640080" y="4530852"/>
+            <a:ext cx="10911535" cy="310896"/>
           </a:xfrm>
           <a:prstGeom prst="rect">
             <a:avLst/>
@@ -4877,13 +4597,13 @@
           <a:p>
             <a:pPr algn="ctr"/>
             <a:r>
-              <a:rPr sz="2400" b="0" i="1">
-                <a:solidFill>
-                  <a:srgbClr val="B4B4B4"/>
+              <a:rPr sz="2000" b="0" i="1">
+                <a:solidFill>
+                  <a:srgbClr val="828282"/>
                 </a:solidFill>
                 <a:latin typeface="Arial"/>
               </a:rPr>
-              <a:t>chi wa yureugoita</a:t>
+              <a:t>O Poder da Cruz</a:t>
             </a:r>
           </a:p>
         </p:txBody>
@@ -4896,8 +4616,8 @@
         </p:nvSpPr>
         <p:spPr>
           <a:xfrm>
-            <a:off x="594360" y="4672584"/>
-            <a:ext cx="11002975" cy="347472"/>
+            <a:off x="640080" y="4896612"/>
+            <a:ext cx="10911535" cy="310896"/>
           </a:xfrm>
           <a:prstGeom prst="rect">
             <a:avLst/>
@@ -4914,11 +4634,11 @@
             <a:r>
               <a:rPr sz="2000" b="0" i="1">
                 <a:solidFill>
-                  <a:srgbClr val="8C8C8C"/>
+                  <a:srgbClr val="828282"/>
                 </a:solidFill>
                 <a:latin typeface="Arial"/>
               </a:rPr>
-              <a:t/>
+              <a:t>Oh, ver o amanhecer</a:t>
             </a:r>
           </a:p>
         </p:txBody>
@@ -4957,8 +4677,8 @@
         </p:nvSpPr>
         <p:spPr>
           <a:xfrm>
-            <a:off x="594360" y="1837944"/>
-            <a:ext cx="11002975" cy="685800"/>
+            <a:off x="640080" y="1650492"/>
+            <a:ext cx="10911535" cy="731520"/>
           </a:xfrm>
           <a:prstGeom prst="rect">
             <a:avLst/>
@@ -4973,7 +4693,7 @@
           <a:p>
             <a:pPr algn="ctr"/>
             <a:r>
-              <a:rPr sz="4400" b="1" i="0">
+              <a:rPr sz="4800" b="1" i="0">
                 <a:solidFill>
                   <a:srgbClr val="FFFFFF"/>
                 </a:solidFill>
@@ -4992,8 +4712,8 @@
         </p:nvSpPr>
         <p:spPr>
           <a:xfrm>
-            <a:off x="594360" y="2560320"/>
-            <a:ext cx="11002975" cy="384048"/>
+            <a:off x="640080" y="2418588"/>
+            <a:ext cx="10911535" cy="365760"/>
           </a:xfrm>
           <a:prstGeom prst="rect">
             <a:avLst/>
@@ -5010,7 +4730,7 @@
             <a:r>
               <a:rPr sz="2400" b="0" i="1">
                 <a:solidFill>
-                  <a:srgbClr val="B4B4B4"/>
+                  <a:srgbClr val="AAAAAA"/>
                 </a:solidFill>
                 <a:latin typeface="Arial"/>
               </a:rPr>
@@ -5027,8 +4747,8 @@
         </p:nvSpPr>
         <p:spPr>
           <a:xfrm>
-            <a:off x="594360" y="2980944"/>
-            <a:ext cx="11002975" cy="347472"/>
+            <a:off x="640080" y="2985516"/>
+            <a:ext cx="10911535" cy="731520"/>
           </a:xfrm>
           <a:prstGeom prst="rect">
             <a:avLst/>
@@ -5043,13 +4763,13 @@
           <a:p>
             <a:pPr algn="ctr"/>
             <a:r>
-              <a:rPr sz="2000" b="0" i="1">
-                <a:solidFill>
-                  <a:srgbClr val="8C8C8C"/>
+              <a:rPr sz="4800" b="1" i="0">
+                <a:solidFill>
+                  <a:srgbClr val="FFFFFF"/>
                 </a:solidFill>
                 <a:latin typeface="Arial"/>
               </a:rPr>
-              <a:t/>
+              <a:t>主は勝たれた</a:t>
             </a:r>
           </a:p>
         </p:txBody>
@@ -5062,8 +4782,8 @@
         </p:nvSpPr>
         <p:spPr>
           <a:xfrm>
-            <a:off x="594360" y="3529584"/>
-            <a:ext cx="11002975" cy="685800"/>
+            <a:off x="640080" y="3753612"/>
+            <a:ext cx="10911535" cy="365760"/>
           </a:xfrm>
           <a:prstGeom prst="rect">
             <a:avLst/>
@@ -5078,13 +4798,13 @@
           <a:p>
             <a:pPr algn="ctr"/>
             <a:r>
-              <a:rPr sz="4400" b="1" i="0">
-                <a:solidFill>
-                  <a:srgbClr val="FFFFFF"/>
+              <a:rPr sz="2400" b="0" i="1">
+                <a:solidFill>
+                  <a:srgbClr val="AAAAAA"/>
                 </a:solidFill>
                 <a:latin typeface="Arial"/>
               </a:rPr>
-              <a:t>主は勝たれた</a:t>
+              <a:t>shu wa katareta</a:t>
             </a:r>
           </a:p>
         </p:txBody>
@@ -5097,8 +4817,8 @@
         </p:nvSpPr>
         <p:spPr>
           <a:xfrm>
-            <a:off x="594360" y="4251960"/>
-            <a:ext cx="11002975" cy="384048"/>
+            <a:off x="640080" y="4530852"/>
+            <a:ext cx="10911535" cy="310896"/>
           </a:xfrm>
           <a:prstGeom prst="rect">
             <a:avLst/>
@@ -5113,13 +4833,13 @@
           <a:p>
             <a:pPr algn="ctr"/>
             <a:r>
-              <a:rPr sz="2400" b="0" i="1">
-                <a:solidFill>
-                  <a:srgbClr val="B4B4B4"/>
+              <a:rPr sz="2000" b="0" i="1">
+                <a:solidFill>
+                  <a:srgbClr val="828282"/>
                 </a:solidFill>
                 <a:latin typeface="Arial"/>
               </a:rPr>
-              <a:t>shu wa katareta</a:t>
+              <a:t>Do dia mais sombrio:</a:t>
             </a:r>
           </a:p>
         </p:txBody>
@@ -5132,8 +4852,8 @@
         </p:nvSpPr>
         <p:spPr>
           <a:xfrm>
-            <a:off x="594360" y="4672584"/>
-            <a:ext cx="11002975" cy="347472"/>
+            <a:off x="640080" y="4896612"/>
+            <a:ext cx="10911535" cy="310896"/>
           </a:xfrm>
           <a:prstGeom prst="rect">
             <a:avLst/>
@@ -5150,11 +4870,11 @@
             <a:r>
               <a:rPr sz="2000" b="0" i="1">
                 <a:solidFill>
-                  <a:srgbClr val="8C8C8C"/>
+                  <a:srgbClr val="828282"/>
                 </a:solidFill>
                 <a:latin typeface="Arial"/>
               </a:rPr>
-              <a:t/>
+              <a:t>Cristo no caminho para o Calvário</a:t>
             </a:r>
           </a:p>
         </p:txBody>

--- a/output_pptx/The_Power_Of_The_Cross.pptx
+++ b/output_pptx/The_Power_Of_The_Cross.pptx
@@ -4119,6 +4119,76 @@
           </a:p>
         </p:txBody>
       </p:sp>
+      <p:sp>
+        <p:nvSpPr>
+          <p:cNvPr id="4" name="TextBox 3"/>
+          <p:cNvSpPr txBox="1"/>
+          <p:nvPr/>
+        </p:nvSpPr>
+        <p:spPr>
+          <a:xfrm>
+            <a:off x="640080" y="4128516"/>
+            <a:ext cx="10911535" cy="310896"/>
+          </a:xfrm>
+          <a:prstGeom prst="rect">
+            <a:avLst/>
+          </a:prstGeom>
+          <a:noFill/>
+        </p:spPr>
+        <p:txBody>
+          <a:bodyPr wrap="square">
+            <a:spAutoFit/>
+          </a:bodyPr>
+          <a:lstStyle/>
+          <a:p>
+            <a:pPr algn="ctr"/>
+            <a:r>
+              <a:rPr sz="2000" b="0" i="0">
+                <a:solidFill>
+                  <a:srgbClr val="828282"/>
+                </a:solidFill>
+                <a:latin typeface="Arial"/>
+              </a:rPr>
+              <a:t>十字架の力</a:t>
+            </a:r>
+          </a:p>
+        </p:txBody>
+      </p:sp>
+      <p:sp>
+        <p:nvSpPr>
+          <p:cNvPr id="5" name="TextBox 4"/>
+          <p:cNvSpPr txBox="1"/>
+          <p:nvPr/>
+        </p:nvSpPr>
+        <p:spPr>
+          <a:xfrm>
+            <a:off x="640080" y="4494276"/>
+            <a:ext cx="10911535" cy="310896"/>
+          </a:xfrm>
+          <a:prstGeom prst="rect">
+            <a:avLst/>
+          </a:prstGeom>
+          <a:noFill/>
+        </p:spPr>
+        <p:txBody>
+          <a:bodyPr wrap="square">
+            <a:spAutoFit/>
+          </a:bodyPr>
+          <a:lstStyle/>
+          <a:p>
+            <a:pPr algn="ctr"/>
+            <a:r>
+              <a:rPr sz="2000" b="0" i="0">
+                <a:solidFill>
+                  <a:srgbClr val="828282"/>
+                </a:solidFill>
+                <a:latin typeface="Arial"/>
+              </a:rPr>
+              <a:t>ああ、夜明けを見る</a:t>
+            </a:r>
+          </a:p>
+        </p:txBody>
+      </p:sp>
     </p:spTree>
   </p:cSld>
   <p:clrMapOvr>
@@ -4215,6 +4285,76 @@
           </a:p>
         </p:txBody>
       </p:sp>
+      <p:sp>
+        <p:nvSpPr>
+          <p:cNvPr id="4" name="TextBox 3"/>
+          <p:cNvSpPr txBox="1"/>
+          <p:nvPr/>
+        </p:nvSpPr>
+        <p:spPr>
+          <a:xfrm>
+            <a:off x="640080" y="4128516"/>
+            <a:ext cx="10911535" cy="310896"/>
+          </a:xfrm>
+          <a:prstGeom prst="rect">
+            <a:avLst/>
+          </a:prstGeom>
+          <a:noFill/>
+        </p:spPr>
+        <p:txBody>
+          <a:bodyPr wrap="square">
+            <a:spAutoFit/>
+          </a:bodyPr>
+          <a:lstStyle/>
+          <a:p>
+            <a:pPr algn="ctr"/>
+            <a:r>
+              <a:rPr sz="2000" b="0" i="0">
+                <a:solidFill>
+                  <a:srgbClr val="828282"/>
+                </a:solidFill>
+                <a:latin typeface="Arial"/>
+              </a:rPr>
+              <a:t>最も暗い日の</a:t>
+            </a:r>
+          </a:p>
+        </p:txBody>
+      </p:sp>
+      <p:sp>
+        <p:nvSpPr>
+          <p:cNvPr id="5" name="TextBox 4"/>
+          <p:cNvSpPr txBox="1"/>
+          <p:nvPr/>
+        </p:nvSpPr>
+        <p:spPr>
+          <a:xfrm>
+            <a:off x="640080" y="4494276"/>
+            <a:ext cx="10911535" cy="310896"/>
+          </a:xfrm>
+          <a:prstGeom prst="rect">
+            <a:avLst/>
+          </a:prstGeom>
+          <a:noFill/>
+        </p:spPr>
+        <p:txBody>
+          <a:bodyPr wrap="square">
+            <a:spAutoFit/>
+          </a:bodyPr>
+          <a:lstStyle/>
+          <a:p>
+            <a:pPr algn="ctr"/>
+            <a:r>
+              <a:rPr sz="2000" b="0" i="0">
+                <a:solidFill>
+                  <a:srgbClr val="828282"/>
+                </a:solidFill>
+                <a:latin typeface="Arial"/>
+              </a:rPr>
+              <a:t>ゴルゴタへ向かうキリスト</a:t>
+            </a:r>
+          </a:p>
+        </p:txBody>
+      </p:sp>
     </p:spTree>
   </p:cSld>
   <p:clrMapOvr>
@@ -4311,6 +4451,76 @@
           </a:p>
         </p:txBody>
       </p:sp>
+      <p:sp>
+        <p:nvSpPr>
+          <p:cNvPr id="4" name="TextBox 3"/>
+          <p:cNvSpPr txBox="1"/>
+          <p:nvPr/>
+        </p:nvSpPr>
+        <p:spPr>
+          <a:xfrm>
+            <a:off x="640080" y="4128516"/>
+            <a:ext cx="10911535" cy="310896"/>
+          </a:xfrm>
+          <a:prstGeom prst="rect">
+            <a:avLst/>
+          </a:prstGeom>
+          <a:noFill/>
+        </p:spPr>
+        <p:txBody>
+          <a:bodyPr wrap="square">
+            <a:spAutoFit/>
+          </a:bodyPr>
+          <a:lstStyle/>
+          <a:p>
+            <a:pPr algn="ctr"/>
+            <a:r>
+              <a:rPr sz="2000" b="0" i="0">
+                <a:solidFill>
+                  <a:srgbClr val="828282"/>
+                </a:solidFill>
+                <a:latin typeface="Arial"/>
+              </a:rPr>
+              <a:t>罪人の男たちに裁かれて</a:t>
+            </a:r>
+          </a:p>
+        </p:txBody>
+      </p:sp>
+      <p:sp>
+        <p:nvSpPr>
+          <p:cNvPr id="5" name="TextBox 4"/>
+          <p:cNvSpPr txBox="1"/>
+          <p:nvPr/>
+        </p:nvSpPr>
+        <p:spPr>
+          <a:xfrm>
+            <a:off x="640080" y="4494276"/>
+            <a:ext cx="10911535" cy="310896"/>
+          </a:xfrm>
+          <a:prstGeom prst="rect">
+            <a:avLst/>
+          </a:prstGeom>
+          <a:noFill/>
+        </p:spPr>
+        <p:txBody>
+          <a:bodyPr wrap="square">
+            <a:spAutoFit/>
+          </a:bodyPr>
+          <a:lstStyle/>
+          <a:p>
+            <a:pPr algn="ctr"/>
+            <a:r>
+              <a:rPr sz="2000" b="0" i="0">
+                <a:solidFill>
+                  <a:srgbClr val="828282"/>
+                </a:solidFill>
+                <a:latin typeface="Arial"/>
+              </a:rPr>
+              <a:t>引き裂かれ、打ちたたかれて</a:t>
+            </a:r>
+          </a:p>
+        </p:txBody>
+      </p:sp>
     </p:spTree>
   </p:cSld>
   <p:clrMapOvr>
@@ -4403,6 +4613,76 @@
                 <a:latin typeface="Arial"/>
               </a:rPr>
               <a:t>Rasgado e espancado</a:t>
+            </a:r>
+          </a:p>
+        </p:txBody>
+      </p:sp>
+      <p:sp>
+        <p:nvSpPr>
+          <p:cNvPr id="4" name="TextBox 3"/>
+          <p:cNvSpPr txBox="1"/>
+          <p:nvPr/>
+        </p:nvSpPr>
+        <p:spPr>
+          <a:xfrm>
+            <a:off x="640080" y="4128516"/>
+            <a:ext cx="10911535" cy="310896"/>
+          </a:xfrm>
+          <a:prstGeom prst="rect">
+            <a:avLst/>
+          </a:prstGeom>
+          <a:noFill/>
+        </p:spPr>
+        <p:txBody>
+          <a:bodyPr wrap="square">
+            <a:spAutoFit/>
+          </a:bodyPr>
+          <a:lstStyle/>
+          <a:p>
+            <a:pPr algn="ctr"/>
+            <a:r>
+              <a:rPr sz="2000" b="0" i="0">
+                <a:solidFill>
+                  <a:srgbClr val="828282"/>
+                </a:solidFill>
+                <a:latin typeface="Arial"/>
+              </a:rPr>
+              <a:t>罪人の男たちに裁かれて</a:t>
+            </a:r>
+          </a:p>
+        </p:txBody>
+      </p:sp>
+      <p:sp>
+        <p:nvSpPr>
+          <p:cNvPr id="5" name="TextBox 4"/>
+          <p:cNvSpPr txBox="1"/>
+          <p:nvPr/>
+        </p:nvSpPr>
+        <p:spPr>
+          <a:xfrm>
+            <a:off x="640080" y="4494276"/>
+            <a:ext cx="10911535" cy="310896"/>
+          </a:xfrm>
+          <a:prstGeom prst="rect">
+            <a:avLst/>
+          </a:prstGeom>
+          <a:noFill/>
+        </p:spPr>
+        <p:txBody>
+          <a:bodyPr wrap="square">
+            <a:spAutoFit/>
+          </a:bodyPr>
+          <a:lstStyle/>
+          <a:p>
+            <a:pPr algn="ctr"/>
+            <a:r>
+              <a:rPr sz="2000" b="0" i="0">
+                <a:solidFill>
+                  <a:srgbClr val="828282"/>
+                </a:solidFill>
+                <a:latin typeface="Arial"/>
+              </a:rPr>
+              <a:t>引き裂かれ、打ちたたかれて</a:t>
             </a:r>
           </a:p>
         </p:txBody>
